--- a/v3/outputs/ORBm_BMAp_panel_decision_combined_EN.pptx
+++ b/v3/outputs/ORBm_BMAp_panel_decision_combined_EN.pptx
@@ -3300,7 +3300,7 @@
                 </a:solidFill>
                 <a:latin typeface="Calibri"/>
               </a:rPr>
-              <a:t>Considered from this figure:  Per2, Pcsk1, Per1  (clock / peptide program).  Arid5b is equally broad (8/12) but is a chromatin TF — a weaker use of a custom slot.  Camk2g is the strongest Down gene (6/12 glut only).</a:t>
+              <a:t>ADD from this figure:  Per2, Pcsk1, Per1, Camk2g  +  Bhlhe40, Sema3e (free on base).  Do not add the other ~263 custom Jesse DEGs — 304 unique genes is a transcriptome, not a 100-slot panel.  Arid5b (8/12) is a chromatin TF and was left out.</a:t>
             </a:r>
           </a:p>
         </p:txBody>
@@ -3429,7 +3429,7 @@
                 </a:solidFill>
                 <a:latin typeface="Calibri"/>
               </a:rPr>
-              <a:t>Left: Jesse's enrichment vs the rest of the atlas.  Right: % expressing in 106,122 Allen ORBm cells.  These are different questions.</a:t>
+              <a:t>Left ranks by enrichment.  Right is the buy list: ADD red / teal, skip grey.  Gpr26 is included (86%).</a:t>
             </a:r>
           </a:p>
         </p:txBody>
@@ -3521,7 +3521,7 @@
                 </a:solidFill>
                 <a:latin typeface="Calibri"/>
               </a:rPr>
-              <a:t>Cckbr and Hcrtr2 are already on the panel and are abundant.  Rxfp1 is Jesse's #2 and free on the Xenium base panel (Allen 34%).</a:t>
+              <a:t>ADD:  Chrm1 (92%)   Grm8 (99%)   Gpr26 (86%)   Rxfp1 (free, 34%).  Already on:  Cckbr (74%)   Hcrtr2 (67%).</a:t>
             </a:r>
           </a:p>
           <a:p>
@@ -3532,7 +3532,7 @@
                 </a:solidFill>
                 <a:latin typeface="Calibri"/>
               </a:rPr>
-              <a:t>Mas1 is Jesse's #1 by enrichment, but only 45% in L5 ET and ~1% in GABA.  Chrm1 (92%) and Grm8 (99%) were never in our 40-GPCR pull — they are the genes Xenium will actually see.</a:t>
+              <a:t>DO NOT ADD:  Mas1 (Jesse #1, but 45% and ~1% in GABA)   Gpr68 (40%)   Mchr1 (32%, only 2 anchors ≥20%).  Enrichment is not abundance — those three fail the 50% line.</a:t>
             </a:r>
           </a:p>
         </p:txBody>
@@ -3753,7 +3753,7 @@
                 </a:solidFill>
                 <a:latin typeface="Calibri"/>
               </a:rPr>
-              <a:t>Nothing further from Dan.  Best leftover is Sfrp1 at spec 0.89.  Honest caveat: Nos1 (0.76), Oprl1 (0.57) and Dnah5 (0.53) already on the sheet sit below Sfrp1 / Glipr1 / Vdr.  Those three were kept for pharmacology, not specificity.</a:t>
+              <a:t>DO NOT ADD Sfrp1 / Glipr1 / Vdr.  All three fail spec &gt; 1.0.  Sfrp1 (21%) peaks in 119 SI–LHA, not BMAp.  Vdr (11%) peaks in 082 CEA–BST.  Glipr1 (22%) is true 113 Ccdc42, but Penk (2.31) and Lamb3 (1.51) already cover it.</a:t>
             </a:r>
           </a:p>
           <a:p>
@@ -3764,7 +3764,7 @@
                 </a:solidFill>
                 <a:latin typeface="Calibri"/>
               </a:rPr>
-              <a:t>Glipr1 (0.88) marks true BMAp (113 Ccdc42), but that anchor already has Penk (2.31) and Lamb3 (1.51).  Do not add a third, weaker probe.</a:t>
+              <a:t>Caveat: Nos1 / Oprl1 / Dnah5 on the sheet sit below those leftovers on spec.  That is a reason to drop them later if we hit the 100-slot cap — not a reason to stack three more weak probes.</a:t>
             </a:r>
           </a:p>
         </p:txBody>
@@ -3893,7 +3893,7 @@
                 </a:solidFill>
                 <a:latin typeface="Calibri"/>
               </a:rPr>
-              <a:t>Jesse DEGs ranked on our 12 anchors  +  Jesse GPCRs filtered by Allen abundance  +  Dan stopped at the 14 already on MSGS111.</a:t>
+              <a:t>These 10 genes are now on SHARED_PANEL_ORDER (168 genes).  Skip Mas1 / Gpr68 / Mchr1, Dan leftovers Sfrp1 / Glipr1 / Vdr, and the rest of Jesse's 304 DEGs.</a:t>
             </a:r>
           </a:p>
         </p:txBody>
@@ -3956,7 +3956,7 @@
                 <a:gridCol w="5715000"/>
                 <a:gridCol w="1097280"/>
               </a:tblGrid>
-              <a:tr h="672737">
+              <a:tr h="784860">
                 <a:tc>
                   <a:txBody>
                     <a:bodyPr wrap="square"/>
@@ -4046,7 +4046,7 @@
                   </a:tcPr>
                 </a:tc>
               </a:tr>
-              <a:tr h="672737">
+              <a:tr h="784860">
                 <a:tc>
                   <a:txBody>
                     <a:bodyPr wrap="square"/>
@@ -4103,7 +4103,7 @@
                           </a:solidFill>
                           <a:latin typeface="Calibri"/>
                         </a:rPr>
-                        <a:t>Cell-type 144 and Dan extras stay.  No Dan gene added this round.</a:t>
+                        <a:t>Cell-type 144 and Dan extras stay.  No further Dan gene this round.</a:t>
                       </a:r>
                     </a:p>
                   </a:txBody>
@@ -4136,7 +4136,7 @@
                   </a:tcPr>
                 </a:tc>
               </a:tr>
-              <a:tr h="672737">
+              <a:tr h="784860">
                 <a:tc>
                   <a:txBody>
                     <a:bodyPr wrap="square"/>
@@ -4149,7 +4149,7 @@
                           </a:solidFill>
                           <a:latin typeface="Calibri"/>
                         </a:rPr>
-                        <a:t>ADD  now</a:t>
+                        <a:t>ADDED  (Jesse state)</a:t>
                       </a:r>
                     </a:p>
                   </a:txBody>
@@ -4171,7 +4171,7 @@
                           </a:solidFill>
                           <a:latin typeface="Calibri"/>
                         </a:rPr>
-                        <a:t>Per2    Pcsk1    Per1</a:t>
+                        <a:t>Per2    Pcsk1    Per1    Camk2g    Bhlhe40    Sema3e</a:t>
                       </a:r>
                     </a:p>
                   </a:txBody>
@@ -4193,7 +4193,7 @@
                           </a:solidFill>
                           <a:latin typeface="Calibri"/>
                         </a:rPr>
-                        <a:t>Slide 1: broadest missing IEGs (11 / 9 / 8 of 12).  Morphine-state clock / peptide program.</a:t>
+                        <a:t>Slide 1: broadest missing morphine DEGs (11 / 9 / 8 / 6 of 12).  Bhlhe40 and Sema3e are free on base.</a:t>
                       </a:r>
                     </a:p>
                   </a:txBody>
@@ -4215,7 +4215,7 @@
                           </a:solidFill>
                           <a:latin typeface="Calibri"/>
                         </a:rPr>
-                        <a:t>3 custom</a:t>
+                        <a:t>4 + 2 free</a:t>
                       </a:r>
                     </a:p>
                   </a:txBody>
@@ -4226,7 +4226,7 @@
                   </a:tcPr>
                 </a:tc>
               </a:tr>
-              <a:tr h="672737">
+              <a:tr h="784860">
                 <a:tc>
                   <a:txBody>
                     <a:bodyPr wrap="square"/>
@@ -4239,7 +4239,7 @@
                           </a:solidFill>
                           <a:latin typeface="Calibri"/>
                         </a:rPr>
-                        <a:t>ADD  now</a:t>
+                        <a:t>ADDED  (Jesse GPCR)</a:t>
                       </a:r>
                     </a:p>
                   </a:txBody>
@@ -4261,7 +4261,7 @@
                           </a:solidFill>
                           <a:latin typeface="Calibri"/>
                         </a:rPr>
-                        <a:t>Chrm1    Grm8    Rxfp1</a:t>
+                        <a:t>Chrm1    Grm8    Gpr26    Rxfp1</a:t>
                       </a:r>
                     </a:p>
                   </a:txBody>
@@ -4283,7 +4283,7 @@
                           </a:solidFill>
                           <a:latin typeface="Calibri"/>
                         </a:rPr>
-                        <a:t>Slide 2: ORB GPCRs that Allen actually sees (92% / 99% / free 34%).  Chrm2 and Grm5 are already on.</a:t>
+                        <a:t>Slide 2: ORB GPCRs Allen actually sees (92% / 99% / 86% / free 34%).  Chrm2 and Grm5 are already on.</a:t>
                       </a:r>
                     </a:p>
                   </a:txBody>
@@ -4305,7 +4305,7 @@
                           </a:solidFill>
                           <a:latin typeface="Calibri"/>
                         </a:rPr>
-                        <a:t>2 + 0</a:t>
+                        <a:t>3 + 1 free</a:t>
                       </a:r>
                     </a:p>
                   </a:txBody>
@@ -4316,7 +4316,7 @@
                   </a:tcPr>
                 </a:tc>
               </a:tr>
-              <a:tr h="672737">
+              <a:tr h="784860">
                 <a:tc>
                   <a:txBody>
                     <a:bodyPr wrap="square"/>
@@ -4329,7 +4329,7 @@
                           </a:solidFill>
                           <a:latin typeface="Calibri"/>
                         </a:rPr>
-                        <a:t>Optional</a:t>
+                        <a:t>On SHARED_PANEL_ORDER</a:t>
                       </a:r>
                     </a:p>
                   </a:txBody>
@@ -4351,7 +4351,7 @@
                           </a:solidFill>
                           <a:latin typeface="Calibri"/>
                         </a:rPr>
-                        <a:t>Camk2g</a:t>
+                        <a:t>168 genes   =   144 + Dan 14 + Jesse 10</a:t>
                       </a:r>
                     </a:p>
                   </a:txBody>
@@ -4373,7 +4373,7 @@
                           </a:solidFill>
                           <a:latin typeface="Calibri"/>
                         </a:rPr>
-                        <a:t>Slide 1: strongest Down gene, 93% abundant.  Add only if you want a direction control.</a:t>
+                        <a:t>47 free on the Xenium base panel + 121 custom.  Original add-on cap is 100 — confirm extras with 10x.</a:t>
                       </a:r>
                     </a:p>
                   </a:txBody>
@@ -4395,7 +4395,7 @@
                           </a:solidFill>
                           <a:latin typeface="Calibri"/>
                         </a:rPr>
-                        <a:t>1 custom</a:t>
+                        <a:t>7 new custom</a:t>
                       </a:r>
                     </a:p>
                   </a:txBody>
@@ -4406,7 +4406,7 @@
                   </a:tcPr>
                 </a:tc>
               </a:tr>
-              <a:tr h="672737">
+              <a:tr h="784860">
                 <a:tc>
                   <a:txBody>
                     <a:bodyPr wrap="square"/>
@@ -4419,7 +4419,7 @@
                           </a:solidFill>
                           <a:latin typeface="Calibri"/>
                         </a:rPr>
-                        <a:t>Free extras</a:t>
+                        <a:t>Do not add</a:t>
                       </a:r>
                     </a:p>
                   </a:txBody>
@@ -4441,7 +4441,7 @@
                           </a:solidFill>
                           <a:latin typeface="Calibri"/>
                         </a:rPr>
-                        <a:t>Sema3e    Bhlhe40</a:t>
+                        <a:t>Mas1  Gpr68  Mchr1    Sfrp1  Glipr1  Vdr    Arid5b  Gadd45a    rest of Jesse</a:t>
                       </a:r>
                     </a:p>
                   </a:txBody>
@@ -4463,7 +4463,7 @@
                           </a:solidFill>
                           <a:latin typeface="Calibri"/>
                         </a:rPr>
-                        <a:t>On the Xenium base panel.  Cheap to curate.  Not required for the argument.</a:t>
+                        <a:t>Low Allen %  /  wrong nucleus or spec &lt; 1.0  /  TF  /  263 other custom DEGs.  Not a transcriptome panel.</a:t>
                       </a:r>
                     </a:p>
                   </a:txBody>
@@ -4485,7 +4485,7 @@
                           </a:solidFill>
                           <a:latin typeface="Calibri"/>
                         </a:rPr>
-                        <a:t>0</a:t>
+                        <a:t>—</a:t>
                       </a:r>
                     </a:p>
                   </a:txBody>
@@ -4496,96 +4496,6 @@
                   </a:tcPr>
                 </a:tc>
               </a:tr>
-              <a:tr h="672738">
-                <a:tc>
-                  <a:txBody>
-                    <a:bodyPr wrap="square"/>
-                    <a:lstStyle/>
-                    <a:p>
-                      <a:r>
-                        <a:rPr sz="1200" b="0">
-                          <a:solidFill>
-                            <a:srgbClr val="1F2937"/>
-                          </a:solidFill>
-                          <a:latin typeface="Calibri"/>
-                        </a:rPr>
-                        <a:t>Do not add</a:t>
-                      </a:r>
-                    </a:p>
-                  </a:txBody>
-                  <a:tcPr>
-                    <a:solidFill>
-                      <a:srgbClr val="FFFFFF"/>
-                    </a:solidFill>
-                  </a:tcPr>
-                </a:tc>
-                <a:tc>
-                  <a:txBody>
-                    <a:bodyPr wrap="square"/>
-                    <a:lstStyle/>
-                    <a:p>
-                      <a:r>
-                        <a:rPr sz="1200" b="0">
-                          <a:solidFill>
-                            <a:srgbClr val="1F2937"/>
-                          </a:solidFill>
-                          <a:latin typeface="Calibri"/>
-                        </a:rPr>
-                        <a:t>Arid5b   Gadd45a   Mas1   Mchr1   more Dan</a:t>
-                      </a:r>
-                    </a:p>
-                  </a:txBody>
-                  <a:tcPr>
-                    <a:solidFill>
-                      <a:srgbClr val="FFFFFF"/>
-                    </a:solidFill>
-                  </a:tcPr>
-                </a:tc>
-                <a:tc>
-                  <a:txBody>
-                    <a:bodyPr wrap="square"/>
-                    <a:lstStyle/>
-                    <a:p>
-                      <a:r>
-                        <a:rPr sz="1200" b="0">
-                          <a:solidFill>
-                            <a:srgbClr val="1F2937"/>
-                          </a:solidFill>
-                          <a:latin typeface="Calibri"/>
-                        </a:rPr>
-                        <a:t>TF / 1-anchor / low Allen % / spec &lt; 1.0.  Spend the slot on Chrm1/Grm8 instead of Arid5b.</a:t>
-                      </a:r>
-                    </a:p>
-                  </a:txBody>
-                  <a:tcPr>
-                    <a:solidFill>
-                      <a:srgbClr val="FFFFFF"/>
-                    </a:solidFill>
-                  </a:tcPr>
-                </a:tc>
-                <a:tc>
-                  <a:txBody>
-                    <a:bodyPr wrap="square"/>
-                    <a:lstStyle/>
-                    <a:p>
-                      <a:r>
-                        <a:rPr sz="1200" b="0">
-                          <a:solidFill>
-                            <a:srgbClr val="1F2937"/>
-                          </a:solidFill>
-                          <a:latin typeface="Calibri"/>
-                        </a:rPr>
-                        <a:t>—</a:t>
-                      </a:r>
-                    </a:p>
-                  </a:txBody>
-                  <a:tcPr>
-                    <a:solidFill>
-                      <a:srgbClr val="FFFFFF"/>
-                    </a:solidFill>
-                  </a:tcPr>
-                </a:tc>
-              </a:tr>
             </a:tbl>
           </a:graphicData>
         </a:graphic>
@@ -4613,13 +4523,13 @@
           <a:lstStyle/>
           <a:p>
             <a:r>
-              <a:rPr sz="1800" b="1">
+              <a:rPr sz="1600" b="1">
                 <a:solidFill>
                   <a:srgbClr val="C44536"/>
                 </a:solidFill>
                 <a:latin typeface="Calibri"/>
               </a:rPr>
-              <a:t>Final new add:    Per2   Pcsk1   Per1    +    Chrm1   Grm8    +    Rxfp1 (free)</a:t>
+              <a:t>On the order sheet:    Per2  Pcsk1  Per1  Camk2g  Bhlhe40  Sema3e    +    Chrm1  Grm8  Gpr26  Rxfp1</a:t>
             </a:r>
           </a:p>
           <a:p>
@@ -4630,7 +4540,7 @@
                 </a:solidFill>
                 <a:latin typeface="Calibri"/>
               </a:rPr>
-              <a:t>Five custom slots on top of Dan 14  →  119 if every Dan gene is kept.  Original cap is 100 — confirm with 10x, or drop CEA-border Dan genes first.</a:t>
+              <a:t>Seven new custom slots on top of Dan 14  →  121 custom if every Dan gene is kept.  Cap is 100 — confirm with 10x, or drop CEA-border Dan genes first.</a:t>
             </a:r>
           </a:p>
         </p:txBody>
